--- a/system-design-101/vi/lessons/sd-02-014/slides/sd-02-014.pptx
+++ b/system-design-101/vi/lessons/sd-02-014/slides/sd-02-014.pptx
@@ -2379,7 +2379,7 @@
               <a:buNone/>
             </a:pPr>
             <a:r>
-              <a:rPr lang="en-US" sz="4200" dirty="0" spc="2" kern="0">
+              <a:rPr lang="en-US" sz="4200" dirty="0" spc="-3" kern="0">
                 <a:solidFill>
                   <a:srgbClr val="F3EEE3"/>
                 </a:solidFill>
@@ -2387,10 +2387,10 @@
                 <a:ea typeface="Bricolage Grotesque ExtraBold" pitchFamily="34" charset="-122"/>
                 <a:cs typeface="Bricolage Grotesque ExtraBold" pitchFamily="34" charset="-120"/>
               </a:rPr>
-              <a:t>giây</a:t>
-            </a:r>
-            <a:r>
-              <a:rPr lang="en-US" sz="4200" dirty="0" spc="-45" kern="0">
+              <a:t>giây,</a:t>
+            </a:r>
+            <a:r>
+              <a:rPr lang="en-US" sz="4200" dirty="0" spc="1" kern="0">
                 <a:solidFill>
                   <a:srgbClr val="F3EEE3"/>
                 </a:solidFill>
@@ -2398,10 +2398,10 @@
                 <a:ea typeface="Bricolage Grotesque ExtraBold" pitchFamily="34" charset="-122"/>
                 <a:cs typeface="Bricolage Grotesque ExtraBold" pitchFamily="34" charset="-120"/>
               </a:rPr>
-              <a:t> trước</a:t>
-            </a:r>
-            <a:r>
-              <a:rPr lang="en-US" sz="4200" dirty="0" spc="-2" kern="0">
+              <a:t> sự chú</a:t>
+            </a:r>
+            <a:r>
+              <a:rPr lang="en-US" sz="4200" dirty="0" spc="2" kern="0">
                 <a:solidFill>
                   <a:srgbClr val="F3EEE3"/>
                 </a:solidFill>
@@ -2409,10 +2409,10 @@
                 <a:ea typeface="Bricolage Grotesque ExtraBold" pitchFamily="34" charset="-122"/>
                 <a:cs typeface="Bricolage Grotesque ExtraBold" pitchFamily="34" charset="-120"/>
               </a:rPr>
-              <a:t> khi</a:t>
-            </a:r>
-            <a:r>
-              <a:rPr lang="en-US" sz="4200" dirty="0" spc="-38" kern="0">
+              <a:t> ý</a:t>
+            </a:r>
+            <a:r>
+              <a:rPr lang="en-US" sz="4200" dirty="0" spc="-37" kern="0">
                 <a:solidFill>
                   <a:srgbClr val="F3EEE3"/>
                 </a:solidFill>
@@ -2420,10 +2420,10 @@
                 <a:ea typeface="Bricolage Grotesque ExtraBold" pitchFamily="34" charset="-122"/>
                 <a:cs typeface="Bricolage Grotesque ExtraBold" pitchFamily="34" charset="-120"/>
               </a:rPr>
-              <a:t> người</a:t>
-            </a:r>
-            <a:r>
-              <a:rPr lang="en-US" sz="4200" dirty="0" spc="-45" kern="0">
+              <a:t> thường</a:t>
+            </a:r>
+            <a:r>
+              <a:rPr lang="en-US" sz="4200" dirty="0" spc="-24" kern="0">
                 <a:solidFill>
                   <a:srgbClr val="F3EEE3"/>
                 </a:solidFill>
@@ -2431,10 +2431,10 @@
                 <a:ea typeface="Bricolage Grotesque ExtraBold" pitchFamily="34" charset="-122"/>
                 <a:cs typeface="Bricolage Grotesque ExtraBold" pitchFamily="34" charset="-120"/>
               </a:rPr>
-              <a:t> xem</a:t>
-            </a:r>
-            <a:r>
-              <a:rPr lang="en-US" sz="4200" dirty="0" spc="1" kern="0">
+              <a:t> kéo</a:t>
+            </a:r>
+            <a:r>
+              <a:rPr lang="en-US" sz="4200" dirty="0" spc="-1" kern="0">
                 <a:solidFill>
                   <a:srgbClr val="F3EEE3"/>
                 </a:solidFill>
@@ -2442,18 +2442,7 @@
                 <a:ea typeface="Bricolage Grotesque ExtraBold" pitchFamily="34" charset="-122"/>
                 <a:cs typeface="Bricolage Grotesque ExtraBold" pitchFamily="34" charset="-120"/>
               </a:rPr>
-              <a:t> mất</a:t>
-            </a:r>
-            <a:r>
-              <a:rPr lang="en-US" sz="4200" dirty="0" spc="6" kern="0">
-                <a:solidFill>
-                  <a:srgbClr val="F3EEE3"/>
-                </a:solidFill>
-                <a:latin typeface="Bricolage Grotesque ExtraBold" pitchFamily="34" charset="0"/>
-                <a:ea typeface="Bricolage Grotesque ExtraBold" pitchFamily="34" charset="-122"/>
-                <a:cs typeface="Bricolage Grotesque ExtraBold" pitchFamily="34" charset="-120"/>
-              </a:rPr>
-              <a:t> hứng</a:t>
+              <a:t> dài</a:t>
             </a:r>
             <a:endParaRPr lang="en-US" sz="4200" dirty="0"/>
           </a:p>
@@ -4239,40 +4228,7 @@
                 <a:ea typeface="Be Vietnam Pro" pitchFamily="34" charset="-122"/>
                 <a:cs typeface="Be Vietnam Pro" pitchFamily="34" charset="-120"/>
               </a:rPr>
-              <a:t> trễ,</a:t>
-            </a:r>
-            <a:r>
-              <a:rPr lang="en-US" sz="2850" dirty="0" spc="0" kern="0">
-                <a:solidFill>
-                  <a:srgbClr val="14161C"/>
-                </a:solidFill>
-                <a:latin typeface="Be Vietnam Pro" pitchFamily="34" charset="0"/>
-                <a:ea typeface="Be Vietnam Pro" pitchFamily="34" charset="-122"/>
-                <a:cs typeface="Be Vietnam Pro" pitchFamily="34" charset="-120"/>
-              </a:rPr>
-              <a:t> giữ</a:t>
-            </a:r>
-            <a:r>
-              <a:rPr lang="en-US" sz="2850" dirty="0" spc="7" kern="0">
-                <a:solidFill>
-                  <a:srgbClr val="14161C"/>
-                </a:solidFill>
-                <a:latin typeface="Be Vietnam Pro" pitchFamily="34" charset="0"/>
-                <a:ea typeface="Be Vietnam Pro" pitchFamily="34" charset="-122"/>
-                <a:cs typeface="Be Vietnam Pro" pitchFamily="34" charset="-120"/>
-              </a:rPr>
-              <a:t> người</a:t>
-            </a:r>
-            <a:r>
-              <a:rPr lang="en-US" sz="2850" dirty="0" spc="-17" kern="0">
-                <a:solidFill>
-                  <a:srgbClr val="14161C"/>
-                </a:solidFill>
-                <a:latin typeface="Be Vietnam Pro" pitchFamily="34" charset="0"/>
-                <a:ea typeface="Be Vietnam Pro" pitchFamily="34" charset="-122"/>
-                <a:cs typeface="Be Vietnam Pro" pitchFamily="34" charset="-120"/>
-              </a:rPr>
-              <a:t> xem.</a:t>
+              <a:t> trễ.</a:t>
             </a:r>
             <a:endParaRPr lang="en-US" sz="2850" dirty="0"/>
           </a:p>
@@ -5597,7 +5553,7 @@
               <a:buNone/>
             </a:pPr>
             <a:r>
-              <a:rPr lang="en-US" sz="2250" dirty="0" spc="3" kern="0">
+              <a:rPr lang="en-US" sz="2250" dirty="0" spc="-2" kern="0">
                 <a:solidFill>
                   <a:srgbClr val="14161C"/>
                 </a:solidFill>
@@ -5605,10 +5561,10 @@
                 <a:ea typeface="Be Vietnam Pro" pitchFamily="34" charset="-122"/>
                 <a:cs typeface="Be Vietnam Pro" pitchFamily="34" charset="-120"/>
               </a:rPr>
-              <a:t>Dữ</a:t>
-            </a:r>
-            <a:r>
-              <a:rPr lang="en-US" sz="2250" dirty="0" spc="-2" kern="0">
+              <a:t>Cách</a:t>
+            </a:r>
+            <a:r>
+              <a:rPr lang="en-US" sz="2250" dirty="0" spc="12" kern="0">
                 <a:solidFill>
                   <a:srgbClr val="14161C"/>
                 </a:solidFill>
@@ -5616,7 +5572,51 @@
                 <a:ea typeface="Be Vietnam Pro" pitchFamily="34" charset="-122"/>
                 <a:cs typeface="Be Vietnam Pro" pitchFamily="34" charset="-120"/>
               </a:rPr>
-              <a:t> liệu</a:t>
+              <a:t> đọc</a:t>
+            </a:r>
+            <a:r>
+              <a:rPr lang="en-US" sz="2250" dirty="0" spc="2" kern="0">
+                <a:solidFill>
+                  <a:srgbClr val="14161C"/>
+                </a:solidFill>
+                <a:latin typeface="Be Vietnam Pro" pitchFamily="34" charset="0"/>
+                <a:ea typeface="Be Vietnam Pro" pitchFamily="34" charset="-122"/>
+                <a:cs typeface="Be Vietnam Pro" pitchFamily="34" charset="-120"/>
+              </a:rPr>
+              <a:t> của</a:t>
+            </a:r>
+            <a:r>
+              <a:rPr lang="en-US" sz="2250" dirty="0" spc="-1" kern="0">
+                <a:solidFill>
+                  <a:srgbClr val="14161C"/>
+                </a:solidFill>
+                <a:latin typeface="Be Vietnam Pro" pitchFamily="34" charset="0"/>
+                <a:ea typeface="Be Vietnam Pro" pitchFamily="34" charset="-122"/>
+                <a:cs typeface="Be Vietnam Pro" pitchFamily="34" charset="-120"/>
+              </a:rPr>
+              <a:t> bài:</a:t>
+            </a:r>
+            <a:r>
+              <a:rPr lang="en-US" sz="2250" dirty="0" spc="-12" kern="0">
+                <a:solidFill>
+                  <a:srgbClr val="14161C"/>
+                </a:solidFill>
+                <a:latin typeface="Be Vietnam Pro" pitchFamily="34" charset="0"/>
+                <a:ea typeface="Be Vietnam Pro" pitchFamily="34" charset="-122"/>
+                <a:cs typeface="Be Vietnam Pro" pitchFamily="34" charset="-120"/>
+              </a:rPr>
+              <a:t> gốc</a:t>
+            </a:r>
+            <a:r>
+              <a:rPr lang="en-US" sz="2250" dirty="0" spc="5" kern="0">
+                <a:solidFill>
+                  <a:srgbClr val="14161C"/>
+                </a:solidFill>
+                <a:latin typeface="Be Vietnam Pro" pitchFamily="34" charset="0"/>
+                <a:ea typeface="Be Vietnam Pro" pitchFamily="34" charset="-122"/>
+                <a:cs typeface="Be Vietnam Pro" pitchFamily="34" charset="-120"/>
+              </a:rPr>
+              <a:t> ở</a:t>
             </a:r>
             <a:r>
               <a:rPr lang="en-US" sz="2250" dirty="0" spc="-11" kern="0">
@@ -5627,10 +5627,10 @@
                 <a:ea typeface="Be Vietnam Pro" pitchFamily="34" charset="-122"/>
                 <a:cs typeface="Be Vietnam Pro" pitchFamily="34" charset="-120"/>
               </a:rPr>
-              <a:t> gốc</a:t>
-            </a:r>
-            <a:r>
-              <a:rPr lang="en-US" sz="2250" dirty="0" spc="4" kern="0">
+              <a:t> Cassandra,</a:t>
+            </a:r>
+            <a:r>
+              <a:rPr lang="en-US" sz="2250" dirty="0" spc="0" kern="0">
                 <a:solidFill>
                   <a:srgbClr val="14161C"/>
                 </a:solidFill>
@@ -5638,10 +5638,10 @@
                 <a:ea typeface="Be Vietnam Pro" pitchFamily="34" charset="-122"/>
                 <a:cs typeface="Be Vietnam Pro" pitchFamily="34" charset="-120"/>
               </a:rPr>
-              <a:t> ở</a:t>
-            </a:r>
-            <a:r>
-              <a:rPr lang="en-US" sz="2250" dirty="0" spc="-11" kern="0">
+              <a:t> bộ</a:t>
+            </a:r>
+            <a:r>
+              <a:rPr lang="en-US" sz="2250" dirty="0" spc="11" kern="0">
                 <a:solidFill>
                   <a:srgbClr val="14161C"/>
                 </a:solidFill>
@@ -5649,10 +5649,10 @@
                 <a:ea typeface="Be Vietnam Pro" pitchFamily="34" charset="-122"/>
                 <a:cs typeface="Be Vietnam Pro" pitchFamily="34" charset="-120"/>
               </a:rPr>
-              <a:t> Cassandra;</a:t>
-            </a:r>
-            <a:r>
-              <a:rPr lang="en-US" sz="2250" dirty="0" spc="0" kern="0">
+              <a:t> đệm</a:t>
+            </a:r>
+            <a:r>
+              <a:rPr lang="en-US" sz="2250" dirty="0" spc="-1" kern="0">
                 <a:solidFill>
                   <a:srgbClr val="14161C"/>
                 </a:solidFill>
@@ -5660,43 +5660,10 @@
                 <a:ea typeface="Be Vietnam Pro" pitchFamily="34" charset="-122"/>
                 <a:cs typeface="Be Vietnam Pro" pitchFamily="34" charset="-120"/>
               </a:rPr>
-              <a:t> bộ</a:t>
-            </a:r>
-            <a:r>
-              <a:rPr lang="en-US" sz="2250" dirty="0" spc="11" kern="0">
-                <a:solidFill>
-                  <a:srgbClr val="14161C"/>
-                </a:solidFill>
-                <a:latin typeface="Be Vietnam Pro" pitchFamily="34" charset="0"/>
-                <a:ea typeface="Be Vietnam Pro" pitchFamily="34" charset="-122"/>
-                <a:cs typeface="Be Vietnam Pro" pitchFamily="34" charset="-120"/>
-              </a:rPr>
-              <a:t> đệm</a:t>
-            </a:r>
-            <a:r>
-              <a:rPr lang="en-US" sz="2250" dirty="0" spc="1" kern="0">
-                <a:solidFill>
-                  <a:srgbClr val="14161C"/>
-                </a:solidFill>
-                <a:latin typeface="Be Vietnam Pro" pitchFamily="34" charset="0"/>
-                <a:ea typeface="Be Vietnam Pro" pitchFamily="34" charset="-122"/>
-                <a:cs typeface="Be Vietnam Pro" pitchFamily="34" charset="-120"/>
-              </a:rPr>
-              <a:t> chỉ</a:t>
-            </a:r>
-            <a:r>
-              <a:rPr lang="en-US" sz="2250" dirty="0" spc="-1" kern="0">
-                <a:solidFill>
-                  <a:srgbClr val="14161C"/>
-                </a:solidFill>
-                <a:latin typeface="Be Vietnam Pro" pitchFamily="34" charset="0"/>
-                <a:ea typeface="Be Vietnam Pro" pitchFamily="34" charset="-122"/>
-                <a:cs typeface="Be Vietnam Pro" pitchFamily="34" charset="-120"/>
-              </a:rPr>
               <a:t> là bản</a:t>
             </a:r>
             <a:r>
-              <a:rPr lang="en-US" sz="2250" dirty="0" spc="-3" kern="0">
+              <a:rPr lang="en-US" sz="2250" dirty="0" spc="-4" kern="0">
                 <a:solidFill>
                   <a:srgbClr val="14161C"/>
                 </a:solidFill>
@@ -6881,7 +6848,84 @@
                 <a:ea typeface="Be Vietnam Pro" pitchFamily="34" charset="-122"/>
                 <a:cs typeface="Be Vietnam Pro" pitchFamily="34" charset="-120"/>
               </a:rPr>
-              <a:t> liệu chỉ</a:t>
+              <a:t> liệu</a:t>
+            </a:r>
+            <a:r>
+              <a:rPr lang="en-US" sz="2100" dirty="0" spc="-8" kern="0">
+                <a:solidFill>
+                  <a:srgbClr val="9AA0B5"/>
+                </a:solidFill>
+                <a:latin typeface="Be Vietnam Pro" pitchFamily="34" charset="0"/>
+                <a:ea typeface="Be Vietnam Pro" pitchFamily="34" charset="-122"/>
+                <a:cs typeface="Be Vietnam Pro" pitchFamily="34" charset="-120"/>
+              </a:rPr>
+              <a:t> ngắn</a:t>
+            </a:r>
+            <a:r>
+              <a:rPr lang="en-US" sz="2100" dirty="0" spc="-2" kern="0">
+                <a:solidFill>
+                  <a:srgbClr val="9AA0B5"/>
+                </a:solidFill>
+                <a:latin typeface="Be Vietnam Pro" pitchFamily="34" charset="0"/>
+                <a:ea typeface="Be Vietnam Pro" pitchFamily="34" charset="-122"/>
+                <a:cs typeface="Be Vietnam Pro" pitchFamily="34" charset="-120"/>
+              </a:rPr>
+              <a:t> hạn</a:t>
+            </a:r>
+            <a:r>
+              <a:rPr lang="en-US" sz="2100" dirty="0" spc="-1" kern="0">
+                <a:solidFill>
+                  <a:srgbClr val="9AA0B5"/>
+                </a:solidFill>
+                <a:latin typeface="Be Vietnam Pro" pitchFamily="34" charset="0"/>
+                <a:ea typeface="Be Vietnam Pro" pitchFamily="34" charset="-122"/>
+                <a:cs typeface="Be Vietnam Pro" pitchFamily="34" charset="-120"/>
+              </a:rPr>
+              <a:t> như thông</a:t>
+            </a:r>
+            <a:r>
+              <a:rPr lang="en-US" sz="2100" dirty="0" spc="0" kern="0">
+                <a:solidFill>
+                  <a:srgbClr val="9AA0B5"/>
+                </a:solidFill>
+                <a:latin typeface="Be Vietnam Pro" pitchFamily="34" charset="0"/>
+                <a:ea typeface="Be Vietnam Pro" pitchFamily="34" charset="-122"/>
+                <a:cs typeface="Be Vietnam Pro" pitchFamily="34" charset="-120"/>
+              </a:rPr>
+              <a:t> tin phiên;</a:t>
+            </a:r>
+            <a:r>
+              <a:rPr lang="en-US" sz="2100" dirty="0" spc="-10" kern="0">
+                <a:solidFill>
+                  <a:srgbClr val="9AA0B5"/>
+                </a:solidFill>
+                <a:latin typeface="Be Vietnam Pro" pitchFamily="34" charset="0"/>
+                <a:ea typeface="Be Vietnam Pro" pitchFamily="34" charset="-122"/>
+                <a:cs typeface="Be Vietnam Pro" pitchFamily="34" charset="-120"/>
+              </a:rPr>
+              <a:t> tên</a:t>
+            </a:r>
+            <a:r>
+              <a:rPr lang="en-US" sz="2100" dirty="0" spc="-2" kern="0">
+                <a:solidFill>
+                  <a:srgbClr val="9AA0B5"/>
+                </a:solidFill>
+                <a:latin typeface="Be Vietnam Pro" pitchFamily="34" charset="0"/>
+                <a:ea typeface="Be Vietnam Pro" pitchFamily="34" charset="-122"/>
+                <a:cs typeface="Be Vietnam Pro" pitchFamily="34" charset="-120"/>
+              </a:rPr>
+              <a:t> dịch</a:t>
+            </a:r>
+            <a:r>
+              <a:rPr lang="en-US" sz="2100" dirty="0" spc="0" kern="0">
+                <a:solidFill>
+                  <a:srgbClr val="9AA0B5"/>
+                </a:solidFill>
+                <a:latin typeface="Be Vietnam Pro" pitchFamily="34" charset="0"/>
+                <a:ea typeface="Be Vietnam Pro" pitchFamily="34" charset="-122"/>
+                <a:cs typeface="Be Vietnam Pro" pitchFamily="34" charset="-120"/>
+              </a:rPr>
+              <a:t> vụ</a:t>
             </a:r>
             <a:r>
               <a:rPr lang="en-US" sz="2100" dirty="0" spc="-4" kern="0">
@@ -6892,10 +6936,10 @@
                 <a:ea typeface="Be Vietnam Pro" pitchFamily="34" charset="-122"/>
                 <a:cs typeface="Be Vietnam Pro" pitchFamily="34" charset="-120"/>
               </a:rPr>
-              <a:t> sống</a:t>
-            </a:r>
-            <a:r>
-              <a:rPr lang="en-US" sz="2100" dirty="0" spc="-15" kern="0">
+              <a:t> A,</a:t>
+            </a:r>
+            <a:r>
+              <a:rPr lang="en-US" sz="2100" dirty="0" spc="-1" kern="0">
                 <a:solidFill>
                   <a:srgbClr val="9AA0B5"/>
                 </a:solidFill>
@@ -6903,10 +6947,10 @@
                 <a:ea typeface="Be Vietnam Pro" pitchFamily="34" charset="-122"/>
                 <a:cs typeface="Be Vietnam Pro" pitchFamily="34" charset="-120"/>
               </a:rPr>
-              <a:t> trong</a:t>
-            </a:r>
-            <a:r>
-              <a:rPr lang="en-US" sz="2100" dirty="0" spc="-8" kern="0">
+              <a:t> B</a:t>
+            </a:r>
+            <a:r>
+              <a:rPr lang="en-US" sz="2100" dirty="0" spc="0" kern="0">
                 <a:solidFill>
                   <a:srgbClr val="9AA0B5"/>
                 </a:solidFill>
@@ -6914,7 +6958,18 @@
                 <a:ea typeface="Be Vietnam Pro" pitchFamily="34" charset="-122"/>
                 <a:cs typeface="Be Vietnam Pro" pitchFamily="34" charset="-120"/>
               </a:rPr>
-              <a:t> một</a:t>
+              <a:t> chỉ</a:t>
+            </a:r>
+            <a:r>
+              <a:rPr lang="en-US" sz="2100" dirty="0" spc="15" kern="0">
+                <a:solidFill>
+                  <a:srgbClr val="9AA0B5"/>
+                </a:solidFill>
+                <a:latin typeface="Be Vietnam Pro" pitchFamily="34" charset="0"/>
+                <a:ea typeface="Be Vietnam Pro" pitchFamily="34" charset="-122"/>
+                <a:cs typeface="Be Vietnam Pro" pitchFamily="34" charset="-120"/>
+              </a:rPr>
+              <a:t> để</a:t>
             </a:r>
             <a:r>
               <a:rPr lang="en-US" sz="2100" dirty="0" spc="0" kern="0">
@@ -6925,76 +6980,10 @@
                 <a:ea typeface="Be Vietnam Pro" pitchFamily="34" charset="-122"/>
                 <a:cs typeface="Be Vietnam Pro" pitchFamily="34" charset="-120"/>
               </a:rPr>
-              <a:t> phiên;</a:t>
-            </a:r>
-            <a:r>
-              <a:rPr lang="en-US" sz="2100" dirty="0" spc="-11" kern="0">
-                <a:solidFill>
-                  <a:srgbClr val="9AA0B5"/>
-                </a:solidFill>
-                <a:latin typeface="Be Vietnam Pro" pitchFamily="34" charset="0"/>
-                <a:ea typeface="Be Vietnam Pro" pitchFamily="34" charset="-122"/>
-                <a:cs typeface="Be Vietnam Pro" pitchFamily="34" charset="-120"/>
-              </a:rPr>
-              <a:t> tên</a:t>
-            </a:r>
-            <a:r>
-              <a:rPr lang="en-US" sz="2100" dirty="0" spc="-1" kern="0">
-                <a:solidFill>
-                  <a:srgbClr val="9AA0B5"/>
-                </a:solidFill>
-                <a:latin typeface="Be Vietnam Pro" pitchFamily="34" charset="0"/>
-                <a:ea typeface="Be Vietnam Pro" pitchFamily="34" charset="-122"/>
-                <a:cs typeface="Be Vietnam Pro" pitchFamily="34" charset="-120"/>
-              </a:rPr>
-              <a:t> dịch vụ</a:t>
+              <a:t> minh</a:t>
             </a:r>
             <a:r>
               <a:rPr lang="en-US" sz="2100" dirty="0" spc="-4" kern="0">
-                <a:solidFill>
-                  <a:srgbClr val="9AA0B5"/>
-                </a:solidFill>
-                <a:latin typeface="Be Vietnam Pro" pitchFamily="34" charset="0"/>
-                <a:ea typeface="Be Vietnam Pro" pitchFamily="34" charset="-122"/>
-                <a:cs typeface="Be Vietnam Pro" pitchFamily="34" charset="-120"/>
-              </a:rPr>
-              <a:t> A,</a:t>
-            </a:r>
-            <a:r>
-              <a:rPr lang="en-US" sz="2100" dirty="0" spc="0" kern="0">
-                <a:solidFill>
-                  <a:srgbClr val="9AA0B5"/>
-                </a:solidFill>
-                <a:latin typeface="Be Vietnam Pro" pitchFamily="34" charset="0"/>
-                <a:ea typeface="Be Vietnam Pro" pitchFamily="34" charset="-122"/>
-                <a:cs typeface="Be Vietnam Pro" pitchFamily="34" charset="-120"/>
-              </a:rPr>
-              <a:t> B chỉ</a:t>
-            </a:r>
-            <a:r>
-              <a:rPr lang="en-US" sz="2100" dirty="0" spc="14" kern="0">
-                <a:solidFill>
-                  <a:srgbClr val="9AA0B5"/>
-                </a:solidFill>
-                <a:latin typeface="Be Vietnam Pro" pitchFamily="34" charset="0"/>
-                <a:ea typeface="Be Vietnam Pro" pitchFamily="34" charset="-122"/>
-                <a:cs typeface="Be Vietnam Pro" pitchFamily="34" charset="-120"/>
-              </a:rPr>
-              <a:t> để</a:t>
-            </a:r>
-            <a:r>
-              <a:rPr lang="en-US" sz="2100" dirty="0" spc="1" kern="0">
-                <a:solidFill>
-                  <a:srgbClr val="9AA0B5"/>
-                </a:solidFill>
-                <a:latin typeface="Be Vietnam Pro" pitchFamily="34" charset="0"/>
-                <a:ea typeface="Be Vietnam Pro" pitchFamily="34" charset="-122"/>
-                <a:cs typeface="Be Vietnam Pro" pitchFamily="34" charset="-120"/>
-              </a:rPr>
-              <a:t> minh</a:t>
-            </a:r>
-            <a:r>
-              <a:rPr lang="en-US" sz="2100" dirty="0" spc="-5" kern="0">
                 <a:solidFill>
                   <a:srgbClr val="9AA0B5"/>
                 </a:solidFill>
@@ -11668,7 +11657,7 @@
               <a:buNone/>
             </a:pPr>
             <a:r>
-              <a:rPr lang="en-US" sz="7500" dirty="0" spc="6" kern="0">
+              <a:rPr lang="en-US" sz="7500" dirty="0" spc="-1" kern="0">
                 <a:solidFill>
                   <a:srgbClr val="14161C"/>
                 </a:solidFill>
@@ -11676,10 +11665,10 @@
                 <a:ea typeface="Bricolage Grotesque ExtraBold" pitchFamily="34" charset="-122"/>
                 <a:cs typeface="Bricolage Grotesque ExtraBold" pitchFamily="34" charset="-120"/>
               </a:rPr>
-              <a:t>Chạy</a:t>
-            </a:r>
-            <a:r>
-              <a:rPr lang="en-US" sz="7500" dirty="0" spc="1" kern="0">
+              <a:t>Có</a:t>
+            </a:r>
+            <a:r>
+              <a:rPr lang="en-US" sz="7500" dirty="0" spc="0" kern="0">
                 <a:solidFill>
                   <a:srgbClr val="14161C"/>
                 </a:solidFill>
@@ -11687,10 +11676,10 @@
                 <a:ea typeface="Bricolage Grotesque ExtraBold" pitchFamily="34" charset="-122"/>
                 <a:cs typeface="Bricolage Grotesque ExtraBold" pitchFamily="34" charset="-120"/>
               </a:rPr>
-              <a:t> lại hệ thống tính</a:t>
-            </a:r>
-            <a:r>
-              <a:rPr lang="en-US" sz="7500" dirty="0" spc="-83" kern="0">
+              <a:t> thể</a:t>
+            </a:r>
+            <a:r>
+              <a:rPr lang="en-US" sz="7500" dirty="0" spc="3" kern="0">
                 <a:solidFill>
                   <a:srgbClr val="14161C"/>
                 </a:solidFill>
@@ -11698,10 +11687,10 @@
                 <a:ea typeface="Bricolage Grotesque ExtraBold" pitchFamily="34" charset="-122"/>
                 <a:cs typeface="Bricolage Grotesque ExtraBold" pitchFamily="34" charset="-120"/>
               </a:rPr>
-              <a:t> trước</a:t>
-            </a:r>
-            <a:r>
-              <a:rPr lang="en-US" sz="7500" dirty="0" spc="-22" kern="0">
+              <a:t> chạy</a:t>
+            </a:r>
+            <a:r>
+              <a:rPr lang="en-US" sz="7500" dirty="0" spc="1" kern="0">
                 <a:solidFill>
                   <a:srgbClr val="14161C"/>
                 </a:solidFill>
@@ -11709,10 +11698,32 @@
                 <a:ea typeface="Bricolage Grotesque ExtraBold" pitchFamily="34" charset="-122"/>
                 <a:cs typeface="Bricolage Grotesque ExtraBold" pitchFamily="34" charset="-120"/>
               </a:rPr>
+              <a:t> lại hệ thống tính</a:t>
+            </a:r>
+            <a:r>
+              <a:rPr lang="en-US" sz="7500" dirty="0" spc="-83" kern="0">
+                <a:solidFill>
+                  <a:srgbClr val="14161C"/>
+                </a:solidFill>
+                <a:latin typeface="Bricolage Grotesque ExtraBold" pitchFamily="34" charset="0"/>
+                <a:ea typeface="Bricolage Grotesque ExtraBold" pitchFamily="34" charset="-122"/>
+                <a:cs typeface="Bricolage Grotesque ExtraBold" pitchFamily="34" charset="-120"/>
+              </a:rPr>
+              <a:t> trước</a:t>
+            </a:r>
+            <a:r>
+              <a:rPr lang="en-US" sz="7500" dirty="0" spc="-21" kern="0">
+                <a:solidFill>
+                  <a:srgbClr val="14161C"/>
+                </a:solidFill>
+                <a:latin typeface="Bricolage Grotesque ExtraBold" pitchFamily="34" charset="0"/>
+                <a:ea typeface="Bricolage Grotesque ExtraBold" pitchFamily="34" charset="-122"/>
+                <a:cs typeface="Bricolage Grotesque ExtraBold" pitchFamily="34" charset="-120"/>
+              </a:rPr>
               <a:t> rồi</a:t>
             </a:r>
             <a:r>
-              <a:rPr lang="en-US" sz="7500" dirty="0" spc="3" kern="0">
+              <a:rPr lang="en-US" sz="7500" dirty="0" spc="2" kern="0">
                 <a:solidFill>
                   <a:srgbClr val="14161C"/>
                 </a:solidFill>
